--- a/Lab Programs/Lab Program-Algorithms.pptx
+++ b/Lab Programs/Lab Program-Algorithms.pptx
@@ -764,7 +764,7 @@
           <a:p>
             <a:fld id="{D9B442E5-3501-493E-B556-8D78E402D194}" type="datetimeFigureOut">
               <a:rPr lang="en-IN" smtClean="0"/>
-              <a:t>28-06-2025</a:t>
+              <a:t>06-07-2025</a:t>
             </a:fld>
             <a:endParaRPr lang="en-IN"/>
           </a:p>
@@ -1433,7 +1433,7 @@
           <a:p>
             <a:fld id="{050FF069-687C-4110-9C8F-B52BF36C2535}" type="datetimeFigureOut">
               <a:rPr lang="en-IN" smtClean="0"/>
-              <a:t>28-06-2025</a:t>
+              <a:t>06-07-2025</a:t>
             </a:fld>
             <a:endParaRPr lang="en-IN"/>
           </a:p>
@@ -1631,7 +1631,7 @@
           <a:p>
             <a:fld id="{050FF069-687C-4110-9C8F-B52BF36C2535}" type="datetimeFigureOut">
               <a:rPr lang="en-IN" smtClean="0"/>
-              <a:t>28-06-2025</a:t>
+              <a:t>06-07-2025</a:t>
             </a:fld>
             <a:endParaRPr lang="en-IN"/>
           </a:p>
@@ -1839,7 +1839,7 @@
           <a:p>
             <a:fld id="{050FF069-687C-4110-9C8F-B52BF36C2535}" type="datetimeFigureOut">
               <a:rPr lang="en-IN" smtClean="0"/>
-              <a:t>28-06-2025</a:t>
+              <a:t>06-07-2025</a:t>
             </a:fld>
             <a:endParaRPr lang="en-IN"/>
           </a:p>
@@ -2037,7 +2037,7 @@
           <a:p>
             <a:fld id="{050FF069-687C-4110-9C8F-B52BF36C2535}" type="datetimeFigureOut">
               <a:rPr lang="en-IN" smtClean="0"/>
-              <a:t>28-06-2025</a:t>
+              <a:t>06-07-2025</a:t>
             </a:fld>
             <a:endParaRPr lang="en-IN"/>
           </a:p>
@@ -2313,7 +2313,7 @@
           <a:p>
             <a:fld id="{050FF069-687C-4110-9C8F-B52BF36C2535}" type="datetimeFigureOut">
               <a:rPr lang="en-IN" smtClean="0"/>
-              <a:t>28-06-2025</a:t>
+              <a:t>06-07-2025</a:t>
             </a:fld>
             <a:endParaRPr lang="en-IN"/>
           </a:p>
@@ -2580,7 +2580,7 @@
           <a:p>
             <a:fld id="{050FF069-687C-4110-9C8F-B52BF36C2535}" type="datetimeFigureOut">
               <a:rPr lang="en-IN" smtClean="0"/>
-              <a:t>28-06-2025</a:t>
+              <a:t>06-07-2025</a:t>
             </a:fld>
             <a:endParaRPr lang="en-IN"/>
           </a:p>
@@ -2994,7 +2994,7 @@
           <a:p>
             <a:fld id="{050FF069-687C-4110-9C8F-B52BF36C2535}" type="datetimeFigureOut">
               <a:rPr lang="en-IN" smtClean="0"/>
-              <a:t>28-06-2025</a:t>
+              <a:t>06-07-2025</a:t>
             </a:fld>
             <a:endParaRPr lang="en-IN"/>
           </a:p>
@@ -3141,7 +3141,7 @@
           <a:p>
             <a:fld id="{050FF069-687C-4110-9C8F-B52BF36C2535}" type="datetimeFigureOut">
               <a:rPr lang="en-IN" smtClean="0"/>
-              <a:t>28-06-2025</a:t>
+              <a:t>06-07-2025</a:t>
             </a:fld>
             <a:endParaRPr lang="en-IN"/>
           </a:p>
@@ -3254,7 +3254,7 @@
           <a:p>
             <a:fld id="{050FF069-687C-4110-9C8F-B52BF36C2535}" type="datetimeFigureOut">
               <a:rPr lang="en-IN" smtClean="0"/>
-              <a:t>28-06-2025</a:t>
+              <a:t>06-07-2025</a:t>
             </a:fld>
             <a:endParaRPr lang="en-IN"/>
           </a:p>
@@ -3573,7 +3573,7 @@
           <a:p>
             <a:fld id="{050FF069-687C-4110-9C8F-B52BF36C2535}" type="datetimeFigureOut">
               <a:rPr lang="en-IN" smtClean="0"/>
-              <a:t>28-06-2025</a:t>
+              <a:t>06-07-2025</a:t>
             </a:fld>
             <a:endParaRPr lang="en-IN"/>
           </a:p>
@@ -3868,7 +3868,7 @@
           <a:p>
             <a:fld id="{050FF069-687C-4110-9C8F-B52BF36C2535}" type="datetimeFigureOut">
               <a:rPr lang="en-IN" smtClean="0"/>
-              <a:t>28-06-2025</a:t>
+              <a:t>06-07-2025</a:t>
             </a:fld>
             <a:endParaRPr lang="en-IN"/>
           </a:p>
@@ -5253,7 +5253,7 @@
           <a:p>
             <a:fld id="{050FF069-687C-4110-9C8F-B52BF36C2535}" type="datetimeFigureOut">
               <a:rPr lang="en-IN" smtClean="0"/>
-              <a:t>28-06-2025</a:t>
+              <a:t>06-07-2025</a:t>
             </a:fld>
             <a:endParaRPr lang="en-IN"/>
           </a:p>
@@ -6142,7 +6142,7 @@
               <a:buAutoNum type="arabicPeriod"/>
             </a:pPr>
             <a:r>
-              <a:rPr lang="en-IN" sz="1800" kern="100" dirty="0">
+              <a:rPr lang="en-IN" sz="1800" b="1" kern="100" dirty="0">
                 <a:effectLst/>
                 <a:latin typeface="Aptos" panose="020B0004020202020204" pitchFamily="34" charset="0"/>
                 <a:ea typeface="Aptos" panose="020B0004020202020204" pitchFamily="34" charset="0"/>
@@ -6163,7 +6163,7 @@
               <a:t>k-Means</a:t>
             </a:r>
             <a:r>
-              <a:rPr lang="en-IN" sz="1800" kern="100" dirty="0">
+              <a:rPr lang="en-IN" sz="1800" b="1" kern="100" dirty="0">
                 <a:effectLst/>
                 <a:latin typeface="Aptos" panose="020B0004020202020204" pitchFamily="34" charset="0"/>
                 <a:ea typeface="Aptos" panose="020B0004020202020204" pitchFamily="34" charset="0"/>
@@ -19950,30 +19950,24 @@
             </a:r>
           </a:p>
           <a:p>
+            <a:r>
+              <a:rPr lang="en-US" sz="2400" dirty="0"/>
+              <a:t>X-axis: Experience (Years)</a:t>
+            </a:r>
+          </a:p>
+          <a:p>
             <a:pPr marL="0" indent="0">
               <a:buNone/>
             </a:pPr>
             <a:r>
               <a:rPr lang="en-US" sz="2400" dirty="0"/>
-              <a:t>🔹 X-axis: Experience (Years)</a:t>
-            </a:r>
-          </a:p>
-          <a:p>
-            <a:pPr marL="0" indent="0">
-              <a:buNone/>
-            </a:pPr>
+              <a:t>This is the same input variable as the main graph.</a:t>
+            </a:r>
+          </a:p>
+          <a:p>
             <a:r>
               <a:rPr lang="en-US" sz="2400" dirty="0"/>
-              <a:t>This is the same input variable as the main graph.</a:t>
-            </a:r>
-          </a:p>
-          <a:p>
-            <a:pPr marL="0" indent="0">
-              <a:buNone/>
-            </a:pPr>
-            <a:r>
-              <a:rPr lang="en-US" sz="2400" dirty="0"/>
-              <a:t>🔹 Y-axis: Residuals</a:t>
+              <a:t>Y-axis: Residuals</a:t>
             </a:r>
           </a:p>
           <a:p>
@@ -20048,7 +20042,7 @@
             </a:pPr>
             <a:r>
               <a:rPr lang="en-US" sz="2400" b="1" dirty="0"/>
-              <a:t>2. 🟢 Green Dots</a:t>
+              <a:t>2. Green Dots</a:t>
             </a:r>
           </a:p>
           <a:p>

--- a/Lab Programs/Lab Program-Algorithms.pptx
+++ b/Lab Programs/Lab Program-Algorithms.pptx
@@ -175,14 +175,6 @@
 </p:presentation>
 </file>
 
-<file path=ppt/revisionInfo.xml><?xml version="1.0" encoding="utf-8"?>
-<p1510:revInfo xmlns:a="http://schemas.openxmlformats.org/drawingml/2006/main" xmlns:r="http://schemas.openxmlformats.org/officeDocument/2006/relationships" xmlns:p1510="http://schemas.microsoft.com/office/powerpoint/2015/10/main">
-  <p1510:revLst>
-    <p1510:client id="{B158E975-0E20-43B3-8221-44D3D217A6A1}" v="28" dt="2025-06-28T05:01:46.022"/>
-  </p1510:revLst>
-</p1510:revInfo>
-</file>
-
 <file path=ppt/changesInfos/changesInfo1.xml><?xml version="1.0" encoding="utf-8"?>
 <pc:chgInfo xmlns:a="http://schemas.openxmlformats.org/drawingml/2006/main" xmlns:r="http://schemas.openxmlformats.org/officeDocument/2006/relationships" xmlns:ac="http://schemas.microsoft.com/office/drawing/2013/main/command" xmlns:pc="http://schemas.microsoft.com/office/powerpoint/2013/main/command">
   <pc:docChgLst>
@@ -353,36 +345,12 @@
           <pc:docMk/>
           <pc:sldMk cId="1138678954" sldId="883"/>
         </pc:sldMkLst>
-        <pc:spChg chg="add">
-          <ac:chgData name="Pramod Naik" userId="ceb6df04-ef15-4d9b-a141-998a03559d75" providerId="ADAL" clId="{B158E975-0E20-43B3-8221-44D3D217A6A1}" dt="2025-06-27T16:46:59.950" v="59"/>
-          <ac:spMkLst>
-            <pc:docMk/>
-            <pc:sldMk cId="1138678954" sldId="883"/>
-            <ac:spMk id="2" creationId="{B074CA9B-0A03-221E-2AD5-8FBE66197A98}"/>
-          </ac:spMkLst>
-        </pc:spChg>
         <pc:spChg chg="mod">
           <ac:chgData name="Pramod Naik" userId="ceb6df04-ef15-4d9b-a141-998a03559d75" providerId="ADAL" clId="{B158E975-0E20-43B3-8221-44D3D217A6A1}" dt="2025-06-27T17:29:40.837" v="99" actId="20577"/>
           <ac:spMkLst>
             <pc:docMk/>
             <pc:sldMk cId="1138678954" sldId="883"/>
             <ac:spMk id="3" creationId="{4035C434-6B87-9919-B399-4690917DE086}"/>
-          </ac:spMkLst>
-        </pc:spChg>
-        <pc:spChg chg="add">
-          <ac:chgData name="Pramod Naik" userId="ceb6df04-ef15-4d9b-a141-998a03559d75" providerId="ADAL" clId="{B158E975-0E20-43B3-8221-44D3D217A6A1}" dt="2025-06-27T16:46:59.950" v="59"/>
-          <ac:spMkLst>
-            <pc:docMk/>
-            <pc:sldMk cId="1138678954" sldId="883"/>
-            <ac:spMk id="4" creationId="{2904943D-D67E-4F7E-3E0E-38C921F374D3}"/>
-          </ac:spMkLst>
-        </pc:spChg>
-        <pc:spChg chg="add">
-          <ac:chgData name="Pramod Naik" userId="ceb6df04-ef15-4d9b-a141-998a03559d75" providerId="ADAL" clId="{B158E975-0E20-43B3-8221-44D3D217A6A1}" dt="2025-06-27T16:46:59.950" v="59"/>
-          <ac:spMkLst>
-            <pc:docMk/>
-            <pc:sldMk cId="1138678954" sldId="883"/>
-            <ac:spMk id="5" creationId="{CC02A80F-000A-DFDD-97A3-E06D084357D1}"/>
           </ac:spMkLst>
         </pc:spChg>
       </pc:sldChg>
@@ -392,46 +360,6 @@
           <pc:docMk/>
           <pc:sldMk cId="657032694" sldId="884"/>
         </pc:sldMkLst>
-        <pc:spChg chg="del">
-          <ac:chgData name="Pramod Naik" userId="ceb6df04-ef15-4d9b-a141-998a03559d75" providerId="ADAL" clId="{B158E975-0E20-43B3-8221-44D3D217A6A1}" dt="2025-06-27T18:03:08.992" v="100"/>
-          <ac:spMkLst>
-            <pc:docMk/>
-            <pc:sldMk cId="657032694" sldId="884"/>
-            <ac:spMk id="3" creationId="{832671CA-4741-6837-6823-B14961805251}"/>
-          </ac:spMkLst>
-        </pc:spChg>
-        <pc:spChg chg="add del mod">
-          <ac:chgData name="Pramod Naik" userId="ceb6df04-ef15-4d9b-a141-998a03559d75" providerId="ADAL" clId="{B158E975-0E20-43B3-8221-44D3D217A6A1}" dt="2025-06-27T18:03:29.368" v="107" actId="26606"/>
-          <ac:spMkLst>
-            <pc:docMk/>
-            <pc:sldMk cId="657032694" sldId="884"/>
-            <ac:spMk id="6" creationId="{783792E4-F83B-529F-1E17-4B14367636D0}"/>
-          </ac:spMkLst>
-        </pc:spChg>
-        <pc:spChg chg="add del mod">
-          <ac:chgData name="Pramod Naik" userId="ceb6df04-ef15-4d9b-a141-998a03559d75" providerId="ADAL" clId="{B158E975-0E20-43B3-8221-44D3D217A6A1}" dt="2025-06-27T18:03:29.368" v="107" actId="26606"/>
-          <ac:spMkLst>
-            <pc:docMk/>
-            <pc:sldMk cId="657032694" sldId="884"/>
-            <ac:spMk id="7" creationId="{DC36454C-E322-F3BC-0305-A982D3259C79}"/>
-          </ac:spMkLst>
-        </pc:spChg>
-        <pc:spChg chg="add del mod">
-          <ac:chgData name="Pramod Naik" userId="ceb6df04-ef15-4d9b-a141-998a03559d75" providerId="ADAL" clId="{B158E975-0E20-43B3-8221-44D3D217A6A1}" dt="2025-06-27T18:03:26.473" v="105" actId="26606"/>
-          <ac:spMkLst>
-            <pc:docMk/>
-            <pc:sldMk cId="657032694" sldId="884"/>
-            <ac:spMk id="9" creationId="{0683F341-FF80-3343-5EAB-C718BFEC7E58}"/>
-          </ac:spMkLst>
-        </pc:spChg>
-        <pc:spChg chg="add del mod">
-          <ac:chgData name="Pramod Naik" userId="ceb6df04-ef15-4d9b-a141-998a03559d75" providerId="ADAL" clId="{B158E975-0E20-43B3-8221-44D3D217A6A1}" dt="2025-06-27T18:03:26.473" v="105" actId="26606"/>
-          <ac:spMkLst>
-            <pc:docMk/>
-            <pc:sldMk cId="657032694" sldId="884"/>
-            <ac:spMk id="11" creationId="{5FED177A-8376-B81A-162C-F0463CCB1CCA}"/>
-          </ac:spMkLst>
-        </pc:spChg>
         <pc:picChg chg="add mod">
           <ac:chgData name="Pramod Naik" userId="ceb6df04-ef15-4d9b-a141-998a03559d75" providerId="ADAL" clId="{B158E975-0E20-43B3-8221-44D3D217A6A1}" dt="2025-06-27T18:04:01.784" v="113" actId="14100"/>
           <ac:picMkLst>
@@ -447,14 +375,6 @@
           <pc:docMk/>
           <pc:sldMk cId="1780658408" sldId="885"/>
         </pc:sldMkLst>
-        <pc:spChg chg="add mod">
-          <ac:chgData name="Pramod Naik" userId="ceb6df04-ef15-4d9b-a141-998a03559d75" providerId="ADAL" clId="{B158E975-0E20-43B3-8221-44D3D217A6A1}" dt="2025-06-27T18:04:39.805" v="115"/>
-          <ac:spMkLst>
-            <pc:docMk/>
-            <pc:sldMk cId="1780658408" sldId="885"/>
-            <ac:spMk id="2" creationId="{49021E70-7B04-2677-DA50-DE9EB3977D6A}"/>
-          </ac:spMkLst>
-        </pc:spChg>
         <pc:spChg chg="add del mod">
           <ac:chgData name="Pramod Naik" userId="ceb6df04-ef15-4d9b-a141-998a03559d75" providerId="ADAL" clId="{B158E975-0E20-43B3-8221-44D3D217A6A1}" dt="2025-06-27T18:10:46.986" v="201" actId="20577"/>
           <ac:spMkLst>
@@ -500,14 +420,6 @@
           <pc:docMk/>
           <pc:sldMk cId="788150859" sldId="888"/>
         </pc:sldMkLst>
-        <pc:spChg chg="del">
-          <ac:chgData name="Pramod Naik" userId="ceb6df04-ef15-4d9b-a141-998a03559d75" providerId="ADAL" clId="{B158E975-0E20-43B3-8221-44D3D217A6A1}" dt="2025-06-27T19:03:04.301" v="272"/>
-          <ac:spMkLst>
-            <pc:docMk/>
-            <pc:sldMk cId="788150859" sldId="888"/>
-            <ac:spMk id="3" creationId="{22721F6C-F0E9-9253-9B74-239AA7341C80}"/>
-          </ac:spMkLst>
-        </pc:spChg>
         <pc:picChg chg="add mod">
           <ac:chgData name="Pramod Naik" userId="ceb6df04-ef15-4d9b-a141-998a03559d75" providerId="ADAL" clId="{B158E975-0E20-43B3-8221-44D3D217A6A1}" dt="2025-06-27T19:03:15.282" v="277" actId="1076"/>
           <ac:picMkLst>
@@ -538,38 +450,6 @@
           <pc:docMk/>
           <pc:sldMk cId="476035746" sldId="891"/>
         </pc:sldMkLst>
-        <pc:spChg chg="del">
-          <ac:chgData name="Pramod Naik" userId="ceb6df04-ef15-4d9b-a141-998a03559d75" providerId="ADAL" clId="{B158E975-0E20-43B3-8221-44D3D217A6A1}" dt="2025-06-28T04:25:58.733" v="343" actId="478"/>
-          <ac:spMkLst>
-            <pc:docMk/>
-            <pc:sldMk cId="476035746" sldId="891"/>
-            <ac:spMk id="2" creationId="{B29ECA2B-EC6B-223E-39EF-1C7A2F564197}"/>
-          </ac:spMkLst>
-        </pc:spChg>
-        <pc:spChg chg="del mod">
-          <ac:chgData name="Pramod Naik" userId="ceb6df04-ef15-4d9b-a141-998a03559d75" providerId="ADAL" clId="{B158E975-0E20-43B3-8221-44D3D217A6A1}" dt="2025-06-28T04:26:35.264" v="350" actId="22"/>
-          <ac:spMkLst>
-            <pc:docMk/>
-            <pc:sldMk cId="476035746" sldId="891"/>
-            <ac:spMk id="3" creationId="{AC24E9D3-19C8-B049-A69B-5F22821D0C52}"/>
-          </ac:spMkLst>
-        </pc:spChg>
-        <pc:spChg chg="add del mod">
-          <ac:chgData name="Pramod Naik" userId="ceb6df04-ef15-4d9b-a141-998a03559d75" providerId="ADAL" clId="{B158E975-0E20-43B3-8221-44D3D217A6A1}" dt="2025-06-28T05:01:51.693" v="369" actId="478"/>
-          <ac:spMkLst>
-            <pc:docMk/>
-            <pc:sldMk cId="476035746" sldId="891"/>
-            <ac:spMk id="9" creationId="{78EB0D94-0919-1619-4569-37AB409EF7FF}"/>
-          </ac:spMkLst>
-        </pc:spChg>
-        <pc:picChg chg="add del mod ord">
-          <ac:chgData name="Pramod Naik" userId="ceb6df04-ef15-4d9b-a141-998a03559d75" providerId="ADAL" clId="{B158E975-0E20-43B3-8221-44D3D217A6A1}" dt="2025-06-28T05:01:48.224" v="368" actId="478"/>
-          <ac:picMkLst>
-            <pc:docMk/>
-            <pc:sldMk cId="476035746" sldId="891"/>
-            <ac:picMk id="5" creationId="{6221948A-178C-1AD9-2980-B1647314AF31}"/>
-          </ac:picMkLst>
-        </pc:picChg>
         <pc:picChg chg="add mod">
           <ac:chgData name="Pramod Naik" userId="ceb6df04-ef15-4d9b-a141-998a03559d75" providerId="ADAL" clId="{B158E975-0E20-43B3-8221-44D3D217A6A1}" dt="2025-06-28T05:01:58.051" v="371" actId="14100"/>
           <ac:picMkLst>
@@ -593,14 +473,6 @@
             <ac:spMk id="3" creationId="{855F3A1B-65AF-D8E2-ABBE-6C900D6D99CF}"/>
           </ac:spMkLst>
         </pc:spChg>
-        <pc:picChg chg="del">
-          <ac:chgData name="Pramod Naik" userId="ceb6df04-ef15-4d9b-a141-998a03559d75" providerId="ADAL" clId="{B158E975-0E20-43B3-8221-44D3D217A6A1}" dt="2025-06-28T04:26:50.359" v="354" actId="478"/>
-          <ac:picMkLst>
-            <pc:docMk/>
-            <pc:sldMk cId="369385158" sldId="892"/>
-            <ac:picMk id="5" creationId="{5072FA6C-E415-ED2C-34A3-7DC356A840AC}"/>
-          </ac:picMkLst>
-        </pc:picChg>
         <pc:picChg chg="add mod">
           <ac:chgData name="Pramod Naik" userId="ceb6df04-ef15-4d9b-a141-998a03559d75" providerId="ADAL" clId="{B158E975-0E20-43B3-8221-44D3D217A6A1}" dt="2025-06-28T04:27:44.670" v="361" actId="14100"/>
           <ac:picMkLst>
@@ -668,14 +540,30 @@
           <pc:docMk/>
           <pc:sldMk cId="1920923831" sldId="897"/>
         </pc:sldMkLst>
-        <pc:picChg chg="del">
-          <ac:chgData name="Pramod Naik" userId="ceb6df04-ef15-4d9b-a141-998a03559d75" providerId="ADAL" clId="{B158E975-0E20-43B3-8221-44D3D217A6A1}" dt="2025-06-28T05:04:36.542" v="372" actId="478"/>
-          <ac:picMkLst>
+      </pc:sldChg>
+    </pc:docChg>
+  </pc:docChgLst>
+  <pc:docChgLst>
+    <pc:chgData name="Pramod Naik" userId="ceb6df04-ef15-4d9b-a141-998a03559d75" providerId="ADAL" clId="{F108514D-1543-4E8C-B71F-048EDEF19F4F}"/>
+    <pc:docChg chg="modSld">
+      <pc:chgData name="Pramod Naik" userId="ceb6df04-ef15-4d9b-a141-998a03559d75" providerId="ADAL" clId="{F108514D-1543-4E8C-B71F-048EDEF19F4F}" dt="2025-07-19T12:16:57.043" v="1" actId="207"/>
+      <pc:docMkLst>
+        <pc:docMk/>
+      </pc:docMkLst>
+      <pc:sldChg chg="modSp mod">
+        <pc:chgData name="Pramod Naik" userId="ceb6df04-ef15-4d9b-a141-998a03559d75" providerId="ADAL" clId="{F108514D-1543-4E8C-B71F-048EDEF19F4F}" dt="2025-07-19T12:16:57.043" v="1" actId="207"/>
+        <pc:sldMkLst>
+          <pc:docMk/>
+          <pc:sldMk cId="769431239" sldId="422"/>
+        </pc:sldMkLst>
+        <pc:spChg chg="mod">
+          <ac:chgData name="Pramod Naik" userId="ceb6df04-ef15-4d9b-a141-998a03559d75" providerId="ADAL" clId="{F108514D-1543-4E8C-B71F-048EDEF19F4F}" dt="2025-07-19T12:16:57.043" v="1" actId="207"/>
+          <ac:spMkLst>
             <pc:docMk/>
-            <pc:sldMk cId="1920923831" sldId="897"/>
-            <ac:picMk id="7" creationId="{E1B9EBE3-20A6-DE55-F621-F1D6706713B3}"/>
-          </ac:picMkLst>
-        </pc:picChg>
+            <pc:sldMk cId="769431239" sldId="422"/>
+            <ac:spMk id="3" creationId="{686DB707-FE8D-6C55-E955-6251D807F941}"/>
+          </ac:spMkLst>
+        </pc:spChg>
       </pc:sldChg>
     </pc:docChg>
   </pc:docChgLst>
@@ -764,7 +652,7 @@
           <a:p>
             <a:fld id="{D9B442E5-3501-493E-B556-8D78E402D194}" type="datetimeFigureOut">
               <a:rPr lang="en-IN" smtClean="0"/>
-              <a:t>06-07-2025</a:t>
+              <a:t>19-07-2025</a:t>
             </a:fld>
             <a:endParaRPr lang="en-IN"/>
           </a:p>
@@ -1433,7 +1321,7 @@
           <a:p>
             <a:fld id="{050FF069-687C-4110-9C8F-B52BF36C2535}" type="datetimeFigureOut">
               <a:rPr lang="en-IN" smtClean="0"/>
-              <a:t>06-07-2025</a:t>
+              <a:t>19-07-2025</a:t>
             </a:fld>
             <a:endParaRPr lang="en-IN"/>
           </a:p>
@@ -1631,7 +1519,7 @@
           <a:p>
             <a:fld id="{050FF069-687C-4110-9C8F-B52BF36C2535}" type="datetimeFigureOut">
               <a:rPr lang="en-IN" smtClean="0"/>
-              <a:t>06-07-2025</a:t>
+              <a:t>19-07-2025</a:t>
             </a:fld>
             <a:endParaRPr lang="en-IN"/>
           </a:p>
@@ -1839,7 +1727,7 @@
           <a:p>
             <a:fld id="{050FF069-687C-4110-9C8F-B52BF36C2535}" type="datetimeFigureOut">
               <a:rPr lang="en-IN" smtClean="0"/>
-              <a:t>06-07-2025</a:t>
+              <a:t>19-07-2025</a:t>
             </a:fld>
             <a:endParaRPr lang="en-IN"/>
           </a:p>
@@ -2037,7 +1925,7 @@
           <a:p>
             <a:fld id="{050FF069-687C-4110-9C8F-B52BF36C2535}" type="datetimeFigureOut">
               <a:rPr lang="en-IN" smtClean="0"/>
-              <a:t>06-07-2025</a:t>
+              <a:t>19-07-2025</a:t>
             </a:fld>
             <a:endParaRPr lang="en-IN"/>
           </a:p>
@@ -2313,7 +2201,7 @@
           <a:p>
             <a:fld id="{050FF069-687C-4110-9C8F-B52BF36C2535}" type="datetimeFigureOut">
               <a:rPr lang="en-IN" smtClean="0"/>
-              <a:t>06-07-2025</a:t>
+              <a:t>19-07-2025</a:t>
             </a:fld>
             <a:endParaRPr lang="en-IN"/>
           </a:p>
@@ -2580,7 +2468,7 @@
           <a:p>
             <a:fld id="{050FF069-687C-4110-9C8F-B52BF36C2535}" type="datetimeFigureOut">
               <a:rPr lang="en-IN" smtClean="0"/>
-              <a:t>06-07-2025</a:t>
+              <a:t>19-07-2025</a:t>
             </a:fld>
             <a:endParaRPr lang="en-IN"/>
           </a:p>
@@ -2994,7 +2882,7 @@
           <a:p>
             <a:fld id="{050FF069-687C-4110-9C8F-B52BF36C2535}" type="datetimeFigureOut">
               <a:rPr lang="en-IN" smtClean="0"/>
-              <a:t>06-07-2025</a:t>
+              <a:t>19-07-2025</a:t>
             </a:fld>
             <a:endParaRPr lang="en-IN"/>
           </a:p>
@@ -3141,7 +3029,7 @@
           <a:p>
             <a:fld id="{050FF069-687C-4110-9C8F-B52BF36C2535}" type="datetimeFigureOut">
               <a:rPr lang="en-IN" smtClean="0"/>
-              <a:t>06-07-2025</a:t>
+              <a:t>19-07-2025</a:t>
             </a:fld>
             <a:endParaRPr lang="en-IN"/>
           </a:p>
@@ -3254,7 +3142,7 @@
           <a:p>
             <a:fld id="{050FF069-687C-4110-9C8F-B52BF36C2535}" type="datetimeFigureOut">
               <a:rPr lang="en-IN" smtClean="0"/>
-              <a:t>06-07-2025</a:t>
+              <a:t>19-07-2025</a:t>
             </a:fld>
             <a:endParaRPr lang="en-IN"/>
           </a:p>
@@ -3573,7 +3461,7 @@
           <a:p>
             <a:fld id="{050FF069-687C-4110-9C8F-B52BF36C2535}" type="datetimeFigureOut">
               <a:rPr lang="en-IN" smtClean="0"/>
-              <a:t>06-07-2025</a:t>
+              <a:t>19-07-2025</a:t>
             </a:fld>
             <a:endParaRPr lang="en-IN"/>
           </a:p>
@@ -3868,7 +3756,7 @@
           <a:p>
             <a:fld id="{050FF069-687C-4110-9C8F-B52BF36C2535}" type="datetimeFigureOut">
               <a:rPr lang="en-IN" smtClean="0"/>
-              <a:t>06-07-2025</a:t>
+              <a:t>19-07-2025</a:t>
             </a:fld>
             <a:endParaRPr lang="en-IN"/>
           </a:p>
@@ -5253,7 +5141,7 @@
           <a:p>
             <a:fld id="{050FF069-687C-4110-9C8F-B52BF36C2535}" type="datetimeFigureOut">
               <a:rPr lang="en-IN" smtClean="0"/>
-              <a:t>06-07-2025</a:t>
+              <a:t>19-07-2025</a:t>
             </a:fld>
             <a:endParaRPr lang="en-IN"/>
           </a:p>
@@ -6127,7 +6015,28 @@
                 <a:ea typeface="Aptos" panose="020B0004020202020204" pitchFamily="34" charset="0"/>
                 <a:cs typeface="Tunga" panose="020B0502040204020203" pitchFamily="34" charset="0"/>
               </a:rPr>
-              <a:t>Write a program to compute summary statistics such as mean, median, mode, standard deviation and variance of the given different types of data. </a:t>
+              <a:t>Write a program to compute </a:t>
+            </a:r>
+            <a:r>
+              <a:rPr lang="en-IN" sz="1800" b="1" kern="100" dirty="0">
+                <a:solidFill>
+                  <a:srgbClr val="C00000"/>
+                </a:solidFill>
+                <a:effectLst/>
+                <a:latin typeface="Aptos" panose="020B0004020202020204" pitchFamily="34" charset="0"/>
+                <a:ea typeface="Aptos" panose="020B0004020202020204" pitchFamily="34" charset="0"/>
+                <a:cs typeface="Tunga" panose="020B0502040204020203" pitchFamily="34" charset="0"/>
+              </a:rPr>
+              <a:t>summary statistics </a:t>
+            </a:r>
+            <a:r>
+              <a:rPr lang="en-IN" sz="1800" kern="100" dirty="0">
+                <a:effectLst/>
+                <a:latin typeface="Aptos" panose="020B0004020202020204" pitchFamily="34" charset="0"/>
+                <a:ea typeface="Aptos" panose="020B0004020202020204" pitchFamily="34" charset="0"/>
+                <a:cs typeface="Tunga" panose="020B0502040204020203" pitchFamily="34" charset="0"/>
+              </a:rPr>
+              <a:t>such as mean, median, mode, standard deviation and variance of the given different types of data. </a:t>
             </a:r>
           </a:p>
           <a:p>

--- a/Lab Programs/Lab Program-Algorithms.pptx
+++ b/Lab Programs/Lab Program-Algorithms.pptx
@@ -546,18 +546,18 @@
   <pc:docChgLst>
     <pc:chgData name="Pramod Naik" userId="ceb6df04-ef15-4d9b-a141-998a03559d75" providerId="ADAL" clId="{F108514D-1543-4E8C-B71F-048EDEF19F4F}"/>
     <pc:docChg chg="modSld">
-      <pc:chgData name="Pramod Naik" userId="ceb6df04-ef15-4d9b-a141-998a03559d75" providerId="ADAL" clId="{F108514D-1543-4E8C-B71F-048EDEF19F4F}" dt="2025-07-19T12:16:57.043" v="1" actId="207"/>
+      <pc:chgData name="Pramod Naik" userId="ceb6df04-ef15-4d9b-a141-998a03559d75" providerId="ADAL" clId="{F108514D-1543-4E8C-B71F-048EDEF19F4F}" dt="2025-07-19T12:26:02.719" v="3" actId="113"/>
       <pc:docMkLst>
         <pc:docMk/>
       </pc:docMkLst>
       <pc:sldChg chg="modSp mod">
-        <pc:chgData name="Pramod Naik" userId="ceb6df04-ef15-4d9b-a141-998a03559d75" providerId="ADAL" clId="{F108514D-1543-4E8C-B71F-048EDEF19F4F}" dt="2025-07-19T12:16:57.043" v="1" actId="207"/>
+        <pc:chgData name="Pramod Naik" userId="ceb6df04-ef15-4d9b-a141-998a03559d75" providerId="ADAL" clId="{F108514D-1543-4E8C-B71F-048EDEF19F4F}" dt="2025-07-19T12:26:02.719" v="3" actId="113"/>
         <pc:sldMkLst>
           <pc:docMk/>
           <pc:sldMk cId="769431239" sldId="422"/>
         </pc:sldMkLst>
         <pc:spChg chg="mod">
-          <ac:chgData name="Pramod Naik" userId="ceb6df04-ef15-4d9b-a141-998a03559d75" providerId="ADAL" clId="{F108514D-1543-4E8C-B71F-048EDEF19F4F}" dt="2025-07-19T12:16:57.043" v="1" actId="207"/>
+          <ac:chgData name="Pramod Naik" userId="ceb6df04-ef15-4d9b-a141-998a03559d75" providerId="ADAL" clId="{F108514D-1543-4E8C-B71F-048EDEF19F4F}" dt="2025-07-19T12:26:02.719" v="3" actId="113"/>
           <ac:spMkLst>
             <pc:docMk/>
             <pc:sldMk cId="769431239" sldId="422"/>
@@ -5880,7 +5880,7 @@
               <a:buAutoNum type="arabicPeriod"/>
             </a:pPr>
             <a:r>
-              <a:rPr lang="en-IN" sz="1800" kern="100" dirty="0">
+              <a:rPr lang="en-IN" sz="1800" b="1" kern="100" dirty="0">
                 <a:effectLst/>
                 <a:latin typeface="Aptos" panose="020B0004020202020204" pitchFamily="34" charset="0"/>
                 <a:ea typeface="Aptos" panose="020B0004020202020204" pitchFamily="34" charset="0"/>
@@ -6009,7 +6009,7 @@
               <a:buAutoNum type="arabicPeriod"/>
             </a:pPr>
             <a:r>
-              <a:rPr lang="en-IN" sz="1800" kern="100" dirty="0">
+              <a:rPr lang="en-IN" sz="1800" b="1" kern="100" dirty="0">
                 <a:effectLst/>
                 <a:latin typeface="Aptos" panose="020B0004020202020204" pitchFamily="34" charset="0"/>
                 <a:ea typeface="Aptos" panose="020B0004020202020204" pitchFamily="34" charset="0"/>
@@ -6030,7 +6030,7 @@
               <a:t>summary statistics </a:t>
             </a:r>
             <a:r>
-              <a:rPr lang="en-IN" sz="1800" kern="100" dirty="0">
+              <a:rPr lang="en-IN" sz="1800" b="1" kern="100" dirty="0">
                 <a:effectLst/>
                 <a:latin typeface="Aptos" panose="020B0004020202020204" pitchFamily="34" charset="0"/>
                 <a:ea typeface="Aptos" panose="020B0004020202020204" pitchFamily="34" charset="0"/>
